--- a/10-plantas/01-steelmaking/05-capacitacion/MO-CC2-03/MO-CC2-03_Capacitacion_AMMX.pptx
+++ b/10-plantas/01-steelmaking/05-capacitacion/MO-CC2-03/MO-CC2-03_Capacitacion_AMMX.pptx
@@ -15020,7 +15020,7 @@
                           <a:ea typeface="Century Gothic" pitchFamily="34" charset="-122"/>
                           <a:cs typeface="Century Gothic" pitchFamily="34" charset="-120"/>
                         </a:rPr>
-                        <a:t>Sobrecalentamiento &lt; 15 °C</a:t>
+                        <a:t>Sobrecalentamiento &lt; 20 °C</a:t>
                       </a:r>
                       <a:endParaRPr lang="en-US" sz="1000" dirty="0">
                         <a:latin typeface="Century Gothic" charset="0"/>
@@ -15088,7 +15088,7 @@
                           <a:ea typeface="Century Gothic" pitchFamily="34" charset="-122"/>
                           <a:cs typeface="Century Gothic" pitchFamily="34" charset="-120"/>
                         </a:rPr>
-                        <a:t>C-06 decide arrancar menos líneas o regresar la olla</a:t>
+                        <a:t>&lt; 20: avisa a C-06; &lt; 15: C-06 decide arrancar menos líneas o regresar la olla</a:t>
                       </a:r>
                       <a:endParaRPr lang="en-US" sz="1000" dirty="0">
                         <a:latin typeface="Century Gothic" charset="0"/>
@@ -16477,7 +16477,7 @@
                           <a:ea typeface="Century Gothic" pitchFamily="34" charset="-122"/>
                           <a:cs typeface="Century Gothic" pitchFamily="34" charset="-120"/>
                         </a:rPr>
-                        <a:t>24 meses</a:t>
+                        <a:t>24 meses; radiación 12</a:t>
                       </a:r>
                       <a:endParaRPr lang="en-US" sz="950" dirty="0">
                         <a:latin typeface="Century Gothic" charset="0"/>
@@ -16819,7 +16819,7 @@
                           <a:ea typeface="Century Gothic" pitchFamily="34" charset="-122"/>
                           <a:cs typeface="Century Gothic" pitchFamily="34" charset="-120"/>
                         </a:rPr>
-                        <a:t>24 meses</a:t>
+                        <a:t>24 meses; radiación 12</a:t>
                       </a:r>
                       <a:endParaRPr lang="en-US" sz="950" dirty="0">
                         <a:latin typeface="Century Gothic" charset="0"/>
@@ -17161,7 +17161,7 @@
                           <a:ea typeface="Century Gothic" pitchFamily="34" charset="-122"/>
                           <a:cs typeface="Century Gothic" pitchFamily="34" charset="-120"/>
                         </a:rPr>
-                        <a:t>24 meses</a:t>
+                        <a:t>24 meses; radiación 12</a:t>
                       </a:r>
                       <a:endParaRPr lang="en-US" sz="950" dirty="0">
                         <a:latin typeface="Century Gothic" charset="0"/>
@@ -18798,7 +18798,7 @@
                 <a:ea typeface="Century Gothic" pitchFamily="34" charset="-122"/>
                 <a:cs typeface="Century Gothic" pitchFamily="34" charset="-120"/>
               </a:rPr>
-              <a:t>24 meses</a:t>
+              <a:t>24 meses; radiación 12</a:t>
             </a:r>
             <a:endParaRPr lang="en-US" sz="900" dirty="0"/>
           </a:p>
@@ -20484,7 +20484,7 @@
                 <a:ea typeface="Calibri" pitchFamily="34" charset="-122"/>
                 <a:cs typeface="Calibri" pitchFamily="34" charset="-120"/>
               </a:rPr>
-              <a:t>Siguiente paso: OJT supervisado y evaluación práctica (TD-P07); registro en IMaS y DC-3/SIRCE. Validación: visto bueno técnica (pendientes: seguridad, laboral, diseño instruccional).</a:t>
+              <a:t>Siguiente paso: OJT supervisado y evaluación práctica (TD-P07); registro en IMaS y DC-3/SIRCE. Validación: visto bueno técnica, seguridad, laboral, diseño instruccional.</a:t>
             </a:r>
             <a:endParaRPr lang="en-US" sz="750" dirty="0"/>
           </a:p>
@@ -29443,7 +29443,7 @@
                           <a:ea typeface="Century Gothic" pitchFamily="34" charset="-122"/>
                           <a:cs typeface="Century Gothic" pitchFamily="34" charset="-120"/>
                         </a:rPr>
-                        <a:t>&lt; 15 °C: C-06 decide</a:t>
+                        <a:t>&lt; 20 avisa; &lt; 15 C-06 decide</a:t>
                       </a:r>
                       <a:endParaRPr lang="en-US" sz="1000" dirty="0">
                         <a:latin typeface="Century Gothic" charset="0"/>
